--- a/classes/parte-4-seguridad-de-aplicaciones-web/094-inyeccion-nosql/clase-094-presentacion.pptx
+++ b/classes/parte-4-seguridad-de-aplicaciones-web/094-inyeccion-nosql/clase-094-presentacion.pptx
@@ -17,6 +17,9 @@
     <p:sldId id="265" r:id="rId16"/>
     <p:sldId id="266" r:id="rId17"/>
     <p:sldId id="267" r:id="rId18"/>
+    <p:sldId id="268" r:id="rId19"/>
+    <p:sldId id="269" r:id="rId20"/>
+    <p:sldId id="270" r:id="rId21"/>
   </p:sldIdLst>
   <p:sldSz cx="9144000" cy="6858000" type="screen4x3"/>
   <p:notesSz cx="6858000" cy="9144000"/>
@@ -3198,7 +3201,7 @@
                   <a:srgbClr val="0B3D2E"/>
                 </a:solidFill>
               </a:rPr>
-              <a:t>⚠️ Errores comunes</a:t>
+              <a:t>✍️ Ejercicios</a:t>
             </a:r>
           </a:p>
         </p:txBody>
@@ -3236,67 +3239,82 @@
                   <a:srgbClr val="22282E"/>
                 </a:solidFill>
               </a:rPr>
-              <a:t>•  El operador no se interpreta — El backend recibe string, no objeto; ajusta Content-Type/formato</a:t>
-            </a:r>
-          </a:p>
-          <a:p>
-            <a:pPr>
-              <a:spcAft>
-                <a:spcPts val="600"/>
-              </a:spcAft>
-            </a:pPr>
-            <a:r>
-              <a:rPr sz="1500">
-                <a:solidFill>
-                  <a:srgbClr val="22282E"/>
-                </a:solidFill>
-              </a:rPr>
-              <a:t>•  $where bloqueado — Deshabilitado en el servidor; usa otros operadores</a:t>
-            </a:r>
-          </a:p>
-          <a:p>
-            <a:pPr>
-              <a:spcAft>
-                <a:spcPts val="600"/>
-              </a:spcAft>
-            </a:pPr>
-            <a:r>
-              <a:rPr sz="1500">
-                <a:solidFill>
-                  <a:srgbClr val="22282E"/>
-                </a:solidFill>
-              </a:rPr>
-              <a:t>•  Regex demasiado lento — Usa anclas ^ y búsqueda incremental</a:t>
-            </a:r>
-          </a:p>
-          <a:p>
-            <a:pPr>
-              <a:spcAft>
-                <a:spcPts val="600"/>
-              </a:spcAft>
-            </a:pPr>
-            <a:r>
-              <a:rPr sz="1500">
-                <a:solidFill>
-                  <a:srgbClr val="22282E"/>
-                </a:solidFill>
-              </a:rPr>
-              <a:t>•  Bypass no funciona en query string — La app parsea distinto; prueba notación param[$ne]</a:t>
-            </a:r>
-          </a:p>
-          <a:p>
-            <a:pPr>
-              <a:spcAft>
-                <a:spcPts val="600"/>
-              </a:spcAft>
-            </a:pPr>
-            <a:r>
-              <a:rPr sz="1500">
-                <a:solidFill>
-                  <a:srgbClr val="22282E"/>
-                </a:solidFill>
-              </a:rPr>
-              <a:t>•  Falsos positivos — Confirma con dos operadores distintos</a:t>
+              <a:t>•  Diferencia el payload en JSON del payload en query string para el mismo bypass.</a:t>
+            </a:r>
+          </a:p>
+          <a:p>
+            <a:pPr>
+              <a:spcAft>
+                <a:spcPts val="600"/>
+              </a:spcAft>
+            </a:pPr>
+            <a:r>
+              <a:rPr sz="1500">
+                <a:solidFill>
+                  <a:srgbClr val="22282E"/>
+                </a:solidFill>
+              </a:rPr>
+              <a:t>•  Reconstruye una contraseña de 8 caracteres con $regex blind.</a:t>
+            </a:r>
+          </a:p>
+          <a:p>
+            <a:pPr>
+              <a:spcAft>
+                <a:spcPts val="600"/>
+              </a:spcAft>
+            </a:pPr>
+            <a:r>
+              <a:rPr sz="1500">
+                <a:solidFill>
+                  <a:srgbClr val="22282E"/>
+                </a:solidFill>
+              </a:rPr>
+              <a:t>•  Explica por qué {"$gt":""} también funciona como bypass.</a:t>
+            </a:r>
+          </a:p>
+          <a:p>
+            <a:pPr>
+              <a:spcAft>
+                <a:spcPts val="600"/>
+              </a:spcAft>
+            </a:pPr>
+            <a:r>
+              <a:rPr sz="1500">
+                <a:solidFill>
+                  <a:srgbClr val="22282E"/>
+                </a:solidFill>
+              </a:rPr>
+              <a:t>•  Escribe la validación en Node que impediría el ataque (comprobar typeof === 'string').</a:t>
+            </a:r>
+          </a:p>
+          <a:p>
+            <a:pPr>
+              <a:spcAft>
+                <a:spcPts val="600"/>
+              </a:spcAft>
+            </a:pPr>
+            <a:r>
+              <a:rPr sz="1500">
+                <a:solidFill>
+                  <a:srgbClr val="22282E"/>
+                </a:solidFill>
+              </a:rPr>
+              <a:t>•  Investiga qué hace $where y por qué está desaconsejado.</a:t>
+            </a:r>
+          </a:p>
+          <a:p>
+            <a:pPr>
+              <a:spcAft>
+                <a:spcPts val="600"/>
+              </a:spcAft>
+            </a:pPr>
+            <a:r>
+              <a:rPr sz="1500">
+                <a:solidFill>
+                  <a:srgbClr val="22282E"/>
+                </a:solidFill>
+              </a:rPr>
+              <a:t>•  Compara conceptualmente SQLi y NoSQLi: similitudes y diferencias.</a:t>
             </a:r>
           </a:p>
         </p:txBody>
@@ -3347,7 +3365,7 @@
                   <a:srgbClr val="0B3D2E"/>
                 </a:solidFill>
               </a:rPr>
-              <a:t>❓ Preguntas frecuentes</a:t>
+              <a:t>📝 Reto verificable</a:t>
             </a:r>
           </a:p>
         </p:txBody>
@@ -3385,82 +3403,22 @@
                   <a:srgbClr val="22282E"/>
                 </a:solidFill>
               </a:rPr>
-              <a:t>•  ❓ ¿Por qué el JSON facilita NoSQLi?</a:t>
-            </a:r>
-          </a:p>
-          <a:p>
-            <a:pPr>
-              <a:spcAft>
-                <a:spcPts val="600"/>
-              </a:spcAft>
-            </a:pPr>
-            <a:r>
-              <a:rPr sz="1500">
-                <a:solidFill>
-                  <a:srgbClr val="22282E"/>
-                </a:solidFill>
-              </a:rPr>
-              <a:t>•  Porque un campo que debería ser string puede convertirse en un objeto con operadores si el servidor no valida el tipo.</a:t>
-            </a:r>
-          </a:p>
-          <a:p>
-            <a:pPr>
-              <a:spcAft>
-                <a:spcPts val="600"/>
-              </a:spcAft>
-            </a:pPr>
-            <a:r>
-              <a:rPr sz="1500">
-                <a:solidFill>
-                  <a:srgbClr val="22282E"/>
-                </a:solidFill>
-              </a:rPr>
-              <a:t>•  ❓ ¿MongoDB es inseguro por diseño?</a:t>
-            </a:r>
-          </a:p>
-          <a:p>
-            <a:pPr>
-              <a:spcAft>
-                <a:spcPts val="600"/>
-              </a:spcAft>
-            </a:pPr>
-            <a:r>
-              <a:rPr sz="1500">
-                <a:solidFill>
-                  <a:srgbClr val="22282E"/>
-                </a:solidFill>
-              </a:rPr>
-              <a:t>•  No; el problema es el código que pasa input sin validar tipos ni sanitizar. Con validación estricta no hay NoSQLi.</a:t>
-            </a:r>
-          </a:p>
-          <a:p>
-            <a:pPr>
-              <a:spcAft>
-                <a:spcPts val="600"/>
-              </a:spcAft>
-            </a:pPr>
-            <a:r>
-              <a:rPr sz="1500">
-                <a:solidFill>
-                  <a:srgbClr val="22282E"/>
-                </a:solidFill>
-              </a:rPr>
-              <a:t>•  ❓ ¿Sirve sqlmap para NoSQL?</a:t>
-            </a:r>
-          </a:p>
-          <a:p>
-            <a:pPr>
-              <a:spcAft>
-                <a:spcPts val="600"/>
-              </a:spcAft>
-            </a:pPr>
-            <a:r>
-              <a:rPr sz="1500">
-                <a:solidFill>
-                  <a:srgbClr val="22282E"/>
-                </a:solidFill>
-              </a:rPr>
-              <a:t>•  No. Para NoSQL existe NoSQLMap y payloads manuales; los conceptos son análogos pero la sintaxis difiere.</a:t>
+              <a:t>•  Consigue un bypass de autenticación en un lab NoSQL (NodeGoat/Juice Shop) y luego extrae parcialmente una credencial con NoSQLi ciega por $regex.</a:t>
+            </a:r>
+          </a:p>
+          <a:p>
+            <a:pPr>
+              <a:spcAft>
+                <a:spcPts val="600"/>
+              </a:spcAft>
+            </a:pPr>
+            <a:r>
+              <a:rPr sz="1500">
+                <a:solidFill>
+                  <a:srgbClr val="22282E"/>
+                </a:solidFill>
+              </a:rPr>
+              <a:t>•  Criterio de aceptación: demuestras el login sin conocer la contraseña y recuperas al menos los primeros caracteres del valor real mediante $regex, documentando los payloads.</a:t>
             </a:r>
           </a:p>
         </p:txBody>
@@ -3511,7 +3469,7 @@
                   <a:srgbClr val="0B3D2E"/>
                 </a:solidFill>
               </a:rPr>
-              <a:t>🔗 Referencias</a:t>
+              <a:t>⚠️ Errores comunes</a:t>
             </a:r>
           </a:p>
         </p:txBody>
@@ -3549,6 +3507,319 @@
                   <a:srgbClr val="22282E"/>
                 </a:solidFill>
               </a:rPr>
+              <a:t>•  El operador no se interpreta — El backend recibe string, no objeto; ajusta Content-Type/formato</a:t>
+            </a:r>
+          </a:p>
+          <a:p>
+            <a:pPr>
+              <a:spcAft>
+                <a:spcPts val="600"/>
+              </a:spcAft>
+            </a:pPr>
+            <a:r>
+              <a:rPr sz="1500">
+                <a:solidFill>
+                  <a:srgbClr val="22282E"/>
+                </a:solidFill>
+              </a:rPr>
+              <a:t>•  $where bloqueado — Deshabilitado en el servidor; usa otros operadores</a:t>
+            </a:r>
+          </a:p>
+          <a:p>
+            <a:pPr>
+              <a:spcAft>
+                <a:spcPts val="600"/>
+              </a:spcAft>
+            </a:pPr>
+            <a:r>
+              <a:rPr sz="1500">
+                <a:solidFill>
+                  <a:srgbClr val="22282E"/>
+                </a:solidFill>
+              </a:rPr>
+              <a:t>•  Regex demasiado lento — Usa anclas ^ y búsqueda incremental</a:t>
+            </a:r>
+          </a:p>
+          <a:p>
+            <a:pPr>
+              <a:spcAft>
+                <a:spcPts val="600"/>
+              </a:spcAft>
+            </a:pPr>
+            <a:r>
+              <a:rPr sz="1500">
+                <a:solidFill>
+                  <a:srgbClr val="22282E"/>
+                </a:solidFill>
+              </a:rPr>
+              <a:t>•  Bypass no funciona en query string — La app parsea distinto; prueba notación param[$ne]</a:t>
+            </a:r>
+          </a:p>
+          <a:p>
+            <a:pPr>
+              <a:spcAft>
+                <a:spcPts val="600"/>
+              </a:spcAft>
+            </a:pPr>
+            <a:r>
+              <a:rPr sz="1500">
+                <a:solidFill>
+                  <a:srgbClr val="22282E"/>
+                </a:solidFill>
+              </a:rPr>
+              <a:t>•  Falsos positivos — Confirma con dos operadores distintos</a:t>
+            </a:r>
+          </a:p>
+        </p:txBody>
+      </p:sp>
+    </p:spTree>
+  </p:cSld>
+  <p:clrMapOvr>
+    <a:masterClrMapping/>
+  </p:clrMapOvr>
+</p:sld>
+</file>
+
+<file path=ppt/slides/slide13.xml><?xml version="1.0" encoding="utf-8"?>
+<p:sld xmlns:a="http://schemas.openxmlformats.org/drawingml/2006/main" xmlns:p="http://schemas.openxmlformats.org/presentationml/2006/main" xmlns:r="http://schemas.openxmlformats.org/officeDocument/2006/relationships">
+  <p:cSld>
+    <p:spTree>
+      <p:nvGrpSpPr>
+        <p:cNvPr id="1" name=""/>
+        <p:cNvGrpSpPr/>
+        <p:nvPr/>
+      </p:nvGrpSpPr>
+      <p:grpSpPr/>
+      <p:sp>
+        <p:nvSpPr>
+          <p:cNvPr id="2" name="TextBox 1"/>
+          <p:cNvSpPr txBox="1"/>
+          <p:nvPr/>
+        </p:nvSpPr>
+        <p:spPr>
+          <a:xfrm>
+            <a:off x="457200" y="320040"/>
+            <a:ext cx="8229600" cy="822960"/>
+          </a:xfrm>
+          <a:prstGeom prst="rect">
+            <a:avLst/>
+          </a:prstGeom>
+          <a:noFill/>
+        </p:spPr>
+        <p:txBody>
+          <a:bodyPr wrap="square">
+            <a:spAutoFit/>
+          </a:bodyPr>
+          <a:lstStyle/>
+          <a:p>
+            <a:r>
+              <a:rPr sz="2600" b="1">
+                <a:solidFill>
+                  <a:srgbClr val="0B3D2E"/>
+                </a:solidFill>
+              </a:rPr>
+              <a:t>❓ Preguntas frecuentes</a:t>
+            </a:r>
+          </a:p>
+        </p:txBody>
+      </p:sp>
+      <p:sp>
+        <p:nvSpPr>
+          <p:cNvPr id="3" name="TextBox 2"/>
+          <p:cNvSpPr txBox="1"/>
+          <p:nvPr/>
+        </p:nvSpPr>
+        <p:spPr>
+          <a:xfrm>
+            <a:off x="457200" y="1280160"/>
+            <a:ext cx="8229600" cy="4937760"/>
+          </a:xfrm>
+          <a:prstGeom prst="rect">
+            <a:avLst/>
+          </a:prstGeom>
+          <a:noFill/>
+        </p:spPr>
+        <p:txBody>
+          <a:bodyPr wrap="square">
+            <a:spAutoFit/>
+          </a:bodyPr>
+          <a:lstStyle/>
+          <a:p>
+            <a:pPr>
+              <a:spcAft>
+                <a:spcPts val="600"/>
+              </a:spcAft>
+            </a:pPr>
+            <a:r>
+              <a:rPr sz="1500">
+                <a:solidFill>
+                  <a:srgbClr val="22282E"/>
+                </a:solidFill>
+              </a:rPr>
+              <a:t>•  ❓ ¿Por qué el JSON facilita NoSQLi?</a:t>
+            </a:r>
+          </a:p>
+          <a:p>
+            <a:pPr>
+              <a:spcAft>
+                <a:spcPts val="600"/>
+              </a:spcAft>
+            </a:pPr>
+            <a:r>
+              <a:rPr sz="1500">
+                <a:solidFill>
+                  <a:srgbClr val="22282E"/>
+                </a:solidFill>
+              </a:rPr>
+              <a:t>•  Porque un campo que debería ser string puede convertirse en un objeto con operadores si el servidor no valida el tipo.</a:t>
+            </a:r>
+          </a:p>
+          <a:p>
+            <a:pPr>
+              <a:spcAft>
+                <a:spcPts val="600"/>
+              </a:spcAft>
+            </a:pPr>
+            <a:r>
+              <a:rPr sz="1500">
+                <a:solidFill>
+                  <a:srgbClr val="22282E"/>
+                </a:solidFill>
+              </a:rPr>
+              <a:t>•  ❓ ¿MongoDB es inseguro por diseño?</a:t>
+            </a:r>
+          </a:p>
+          <a:p>
+            <a:pPr>
+              <a:spcAft>
+                <a:spcPts val="600"/>
+              </a:spcAft>
+            </a:pPr>
+            <a:r>
+              <a:rPr sz="1500">
+                <a:solidFill>
+                  <a:srgbClr val="22282E"/>
+                </a:solidFill>
+              </a:rPr>
+              <a:t>•  No; el problema es el código que pasa input sin validar tipos ni sanitizar. Con validación estricta no hay NoSQLi.</a:t>
+            </a:r>
+          </a:p>
+          <a:p>
+            <a:pPr>
+              <a:spcAft>
+                <a:spcPts val="600"/>
+              </a:spcAft>
+            </a:pPr>
+            <a:r>
+              <a:rPr sz="1500">
+                <a:solidFill>
+                  <a:srgbClr val="22282E"/>
+                </a:solidFill>
+              </a:rPr>
+              <a:t>•  ❓ ¿Sirve sqlmap para NoSQL?</a:t>
+            </a:r>
+          </a:p>
+          <a:p>
+            <a:pPr>
+              <a:spcAft>
+                <a:spcPts val="600"/>
+              </a:spcAft>
+            </a:pPr>
+            <a:r>
+              <a:rPr sz="1500">
+                <a:solidFill>
+                  <a:srgbClr val="22282E"/>
+                </a:solidFill>
+              </a:rPr>
+              <a:t>•  No. Para NoSQL existe NoSQLMap y payloads manuales; los conceptos son análogos pero la sintaxis difiere.</a:t>
+            </a:r>
+          </a:p>
+        </p:txBody>
+      </p:sp>
+    </p:spTree>
+  </p:cSld>
+  <p:clrMapOvr>
+    <a:masterClrMapping/>
+  </p:clrMapOvr>
+</p:sld>
+</file>
+
+<file path=ppt/slides/slide14.xml><?xml version="1.0" encoding="utf-8"?>
+<p:sld xmlns:a="http://schemas.openxmlformats.org/drawingml/2006/main" xmlns:p="http://schemas.openxmlformats.org/presentationml/2006/main" xmlns:r="http://schemas.openxmlformats.org/officeDocument/2006/relationships">
+  <p:cSld>
+    <p:spTree>
+      <p:nvGrpSpPr>
+        <p:cNvPr id="1" name=""/>
+        <p:cNvGrpSpPr/>
+        <p:nvPr/>
+      </p:nvGrpSpPr>
+      <p:grpSpPr/>
+      <p:sp>
+        <p:nvSpPr>
+          <p:cNvPr id="2" name="TextBox 1"/>
+          <p:cNvSpPr txBox="1"/>
+          <p:nvPr/>
+        </p:nvSpPr>
+        <p:spPr>
+          <a:xfrm>
+            <a:off x="457200" y="320040"/>
+            <a:ext cx="8229600" cy="822960"/>
+          </a:xfrm>
+          <a:prstGeom prst="rect">
+            <a:avLst/>
+          </a:prstGeom>
+          <a:noFill/>
+        </p:spPr>
+        <p:txBody>
+          <a:bodyPr wrap="square">
+            <a:spAutoFit/>
+          </a:bodyPr>
+          <a:lstStyle/>
+          <a:p>
+            <a:r>
+              <a:rPr sz="2600" b="1">
+                <a:solidFill>
+                  <a:srgbClr val="0B3D2E"/>
+                </a:solidFill>
+              </a:rPr>
+              <a:t>🔗 Referencias</a:t>
+            </a:r>
+          </a:p>
+        </p:txBody>
+      </p:sp>
+      <p:sp>
+        <p:nvSpPr>
+          <p:cNvPr id="3" name="TextBox 2"/>
+          <p:cNvSpPr txBox="1"/>
+          <p:nvPr/>
+        </p:nvSpPr>
+        <p:spPr>
+          <a:xfrm>
+            <a:off x="457200" y="1280160"/>
+            <a:ext cx="8229600" cy="4937760"/>
+          </a:xfrm>
+          <a:prstGeom prst="rect">
+            <a:avLst/>
+          </a:prstGeom>
+          <a:noFill/>
+        </p:spPr>
+        <p:txBody>
+          <a:bodyPr wrap="square">
+            <a:spAutoFit/>
+          </a:bodyPr>
+          <a:lstStyle/>
+          <a:p>
+            <a:pPr>
+              <a:spcAft>
+                <a:spcPts val="600"/>
+              </a:spcAft>
+            </a:pPr>
+            <a:r>
+              <a:rPr sz="1500">
+                <a:solidFill>
+                  <a:srgbClr val="22282E"/>
+                </a:solidFill>
+              </a:rPr>
               <a:t>•  OWASP Testing for NoSQL Injection (WSTG).</a:t>
             </a:r>
           </a:p>
@@ -3584,6 +3855,81 @@
           </a:p>
         </p:txBody>
       </p:sp>
+    </p:spTree>
+  </p:cSld>
+  <p:clrMapOvr>
+    <a:masterClrMapping/>
+  </p:clrMapOvr>
+</p:sld>
+</file>
+
+<file path=ppt/slides/slide15.xml><?xml version="1.0" encoding="utf-8"?>
+<p:sld xmlns:a="http://schemas.openxmlformats.org/drawingml/2006/main" xmlns:p="http://schemas.openxmlformats.org/presentationml/2006/main" xmlns:r="http://schemas.openxmlformats.org/officeDocument/2006/relationships">
+  <p:cSld>
+    <p:spTree>
+      <p:nvGrpSpPr>
+        <p:cNvPr id="1" name=""/>
+        <p:cNvGrpSpPr/>
+        <p:nvPr/>
+      </p:nvGrpSpPr>
+      <p:grpSpPr/>
+      <p:sp>
+        <p:nvSpPr>
+          <p:cNvPr id="2" name="TextBox 1"/>
+          <p:cNvSpPr txBox="1"/>
+          <p:nvPr/>
+        </p:nvSpPr>
+        <p:spPr>
+          <a:xfrm>
+            <a:off x="457200" y="274320"/>
+            <a:ext cx="8229600" cy="640080"/>
+          </a:xfrm>
+          <a:prstGeom prst="rect">
+            <a:avLst/>
+          </a:prstGeom>
+          <a:noFill/>
+        </p:spPr>
+        <p:txBody>
+          <a:bodyPr wrap="square">
+            <a:spAutoFit/>
+          </a:bodyPr>
+          <a:lstStyle/>
+          <a:p>
+            <a:r>
+              <a:rPr sz="2200" b="1">
+                <a:solidFill>
+                  <a:srgbClr val="0B3D2E"/>
+                </a:solidFill>
+              </a:rPr>
+              <a:t>Diagrama de la clase</a:t>
+            </a:r>
+          </a:p>
+        </p:txBody>
+      </p:sp>
+      <p:pic>
+        <p:nvPicPr>
+          <p:cNvPr id="3" name="Picture 2" descr="d90febf6c2afc4b3.png"/>
+          <p:cNvPicPr>
+            <a:picLocks noChangeAspect="1"/>
+          </p:cNvPicPr>
+          <p:nvPr/>
+        </p:nvPicPr>
+        <p:blipFill>
+          <a:blip r:embed="rId2"/>
+          <a:stretch>
+            <a:fillRect/>
+          </a:stretch>
+        </p:blipFill>
+        <p:spPr>
+          <a:xfrm>
+            <a:off x="2755726" y="1097280"/>
+            <a:ext cx="3632547" cy="5303520"/>
+          </a:xfrm>
+          <a:prstGeom prst="rect">
+            <a:avLst/>
+          </a:prstGeom>
+        </p:spPr>
+      </p:pic>
     </p:spTree>
   </p:cSld>
   <p:clrMapOvr>
@@ -3668,7 +4014,7 @@
                   <a:srgbClr val="22282E"/>
                 </a:solidFill>
               </a:rPr>
-              <a:t>•  Entender que la inyección no es exclusiva de SQL: las bases NoSQL (MongoDB, etc.) tienen sus propios vectores. Aprenderás a explotar operadores de MongoDB y JavaScript del lado servidor para saltar autenticación y extraer datos.</a:t>
+              <a:t>•  Entender que la inyección no es exclusiva de SQL: las bases NoSQL (MongoDB, etc.) tienen sus propios vectores. Aprenderás a explotar operadores de MongoDB y JavaScript del lado servidor para saltar…</a:t>
             </a:r>
           </a:p>
         </p:txBody>
@@ -4062,7 +4408,7 @@
                   <a:srgbClr val="0B3D2E"/>
                 </a:solidFill>
               </a:rPr>
-              <a:t>📖 Definiciones y características</a:t>
+              <a:t>🧠 Explicación en profundidad</a:t>
             </a:r>
           </a:p>
         </p:txBody>
@@ -4100,82 +4446,97 @@
                   <a:srgbClr val="22282E"/>
                 </a:solidFill>
               </a:rPr>
-              <a:t>•  NoSQL injection: manipular consultas de bases no relacionales insertando operadores u objetos. Característica: se aprovecha del tipado débil del input.</a:t>
-            </a:r>
-          </a:p>
-          <a:p>
-            <a:pPr>
-              <a:spcAft>
-                <a:spcPts val="600"/>
-              </a:spcAft>
-            </a:pPr>
-            <a:r>
-              <a:rPr sz="1500">
-                <a:solidFill>
-                  <a:srgbClr val="22282E"/>
-                </a:solidFill>
-              </a:rPr>
-              <a:t>•  Operador $ne: "not equal". Característica: {"$ne": null} casi siempre es verdadero, ideal para bypass.</a:t>
-            </a:r>
-          </a:p>
-          <a:p>
-            <a:pPr>
-              <a:spcAft>
-                <a:spcPts val="600"/>
-              </a:spcAft>
-            </a:pPr>
-            <a:r>
-              <a:rPr sz="1500">
-                <a:solidFill>
-                  <a:srgbClr val="22282E"/>
-                </a:solidFill>
-              </a:rPr>
-              <a:t>•  Operador $regex: coincidencia por expresión regular. Característica: permite inferir datos carácter a carácter (blind).</a:t>
-            </a:r>
-          </a:p>
-          <a:p>
-            <a:pPr>
-              <a:spcAft>
-                <a:spcPts val="600"/>
-              </a:spcAft>
-            </a:pPr>
-            <a:r>
-              <a:rPr sz="1500">
-                <a:solidFill>
-                  <a:srgbClr val="22282E"/>
-                </a:solidFill>
-              </a:rPr>
-              <a:t>•  $where: ejecuta JavaScript en el servidor Mongo. Característica: potente y peligroso; puede permitir DoS o extracción.</a:t>
-            </a:r>
-          </a:p>
-          <a:p>
-            <a:pPr>
-              <a:spcAft>
-                <a:spcPts val="600"/>
-              </a:spcAft>
-            </a:pPr>
-            <a:r>
-              <a:rPr sz="1500">
-                <a:solidFill>
-                  <a:srgbClr val="22282E"/>
-                </a:solidFill>
-              </a:rPr>
-              <a:t>•  Inyección de objeto: enviar {"$ne":""} donde se espera un string. Característica: posible cuando el backend no valida tipos.</a:t>
-            </a:r>
-          </a:p>
-          <a:p>
-            <a:pPr>
-              <a:spcAft>
-                <a:spcPts val="600"/>
-              </a:spcAft>
-            </a:pPr>
-            <a:r>
-              <a:rPr sz="1500">
-                <a:solidFill>
-                  <a:srgbClr val="22282E"/>
-                </a:solidFill>
-              </a:rPr>
-              <a:t>•  Type juggling: confusión de tipos entre cliente y servidor. Característica: base de muchos bypass NoSQL.</a:t>
+              <a:t>•  Que una aplicación use MongoDB en lugar de SQL no la hace inmune a la inyección: el fallo</a:t>
+            </a:r>
+          </a:p>
+          <a:p>
+            <a:pPr>
+              <a:spcAft>
+                <a:spcPts val="600"/>
+              </a:spcAft>
+            </a:pPr>
+            <a:r>
+              <a:rPr sz="1500">
+                <a:solidFill>
+                  <a:srgbClr val="22282E"/>
+                </a:solidFill>
+              </a:rPr>
+              <a:t>•  raíz —mezclar entrada del usuario con la lógica de la consulta— es el mismo, solo cambia la</a:t>
+            </a:r>
+          </a:p>
+          <a:p>
+            <a:pPr>
+              <a:spcAft>
+                <a:spcPts val="600"/>
+              </a:spcAft>
+            </a:pPr>
+            <a:r>
+              <a:rPr sz="1500">
+                <a:solidFill>
+                  <a:srgbClr val="22282E"/>
+                </a:solidFill>
+              </a:rPr>
+              <a:t>•  forma. En las bases NoSQL documentales como MongoDB, las consultas no son cadenas de texto</a:t>
+            </a:r>
+          </a:p>
+          <a:p>
+            <a:pPr>
+              <a:spcAft>
+                <a:spcPts val="600"/>
+              </a:spcAft>
+            </a:pPr>
+            <a:r>
+              <a:rPr sz="1500">
+                <a:solidFill>
+                  <a:srgbClr val="22282E"/>
+                </a:solidFill>
+              </a:rPr>
+              <a:t>•  sino estructuras de datos (objetos JSON con operadores), y ahí está la vuelta de tuerca: la</a:t>
+            </a:r>
+          </a:p>
+          <a:p>
+            <a:pPr>
+              <a:spcAft>
+                <a:spcPts val="600"/>
+              </a:spcAft>
+            </a:pPr>
+            <a:r>
+              <a:rPr sz="1500">
+                <a:solidFill>
+                  <a:srgbClr val="22282E"/>
+                </a:solidFill>
+              </a:rPr>
+              <a:t>•  inyección no consiste en romper una cadena con una comilla, sino en cambiar el tipo o la</a:t>
+            </a:r>
+          </a:p>
+          <a:p>
+            <a:pPr>
+              <a:spcAft>
+                <a:spcPts val="600"/>
+              </a:spcAft>
+            </a:pPr>
+            <a:r>
+              <a:rPr sz="1500">
+                <a:solidFill>
+                  <a:srgbClr val="22282E"/>
+                </a:solidFill>
+              </a:rPr>
+              <a:t>•  estructura de lo que se envía para introducir operadores que la aplicación no esperaba.</a:t>
+            </a:r>
+          </a:p>
+          <a:p>
+            <a:pPr>
+              <a:spcAft>
+                <a:spcPts val="600"/>
+              </a:spcAft>
+            </a:pPr>
+            <a:r>
+              <a:rPr sz="1500">
+                <a:solidFill>
+                  <a:srgbClr val="22282E"/>
+                </a:solidFill>
+              </a:rPr>
+              <a:t>•  Entender esto es clave porque las defensas mentales del programador ("escapo las comillas")</a:t>
             </a:r>
           </a:p>
         </p:txBody>
@@ -4226,7 +4587,7 @@
                   <a:srgbClr val="0B3D2E"/>
                 </a:solidFill>
               </a:rPr>
-              <a:t>🧰 Herramientas y preparación</a:t>
+              <a:t>📖 Definiciones y características</a:t>
             </a:r>
           </a:p>
         </p:txBody>
@@ -4264,52 +4625,82 @@
                   <a:srgbClr val="22282E"/>
                 </a:solidFill>
               </a:rPr>
-              <a:t>•  OWASP Juice Shop (usa MongoDB-like en algunos retos) o un lab DVNA/NodeGoat.</a:t>
-            </a:r>
-          </a:p>
-          <a:p>
-            <a:pPr>
-              <a:spcAft>
-                <a:spcPts val="600"/>
-              </a:spcAft>
-            </a:pPr>
-            <a:r>
-              <a:rPr sz="1500">
-                <a:solidFill>
-                  <a:srgbClr val="22282E"/>
-                </a:solidFill>
-              </a:rPr>
-              <a:t>•  Burp Suite para editar cuerpos JSON.</a:t>
-            </a:r>
-          </a:p>
-          <a:p>
-            <a:pPr>
-              <a:spcAft>
-                <a:spcPts val="600"/>
-              </a:spcAft>
-            </a:pPr>
-            <a:r>
-              <a:rPr sz="1500">
-                <a:solidFill>
-                  <a:srgbClr val="22282E"/>
-                </a:solidFill>
-              </a:rPr>
-              <a:t>•  NoSQLMap (opcional, para automatizar).</a:t>
-            </a:r>
-          </a:p>
-          <a:p>
-            <a:pPr>
-              <a:spcAft>
-                <a:spcPts val="600"/>
-              </a:spcAft>
-            </a:pPr>
-            <a:r>
-              <a:rPr sz="1500">
-                <a:solidFill>
-                  <a:srgbClr val="22282E"/>
-                </a:solidFill>
-              </a:rPr>
-              <a:t>•  git clone https://github.com/OWASP/NodeGoat &amp;&amp; cd NodeGoat &amp;&amp; docker compose up</a:t>
+              <a:t>•  NoSQL injection: manipular consultas de bases no relacionales insertando operadores u objetos. Característica: se aprovecha del tipado débil del input.</a:t>
+            </a:r>
+          </a:p>
+          <a:p>
+            <a:pPr>
+              <a:spcAft>
+                <a:spcPts val="600"/>
+              </a:spcAft>
+            </a:pPr>
+            <a:r>
+              <a:rPr sz="1500">
+                <a:solidFill>
+                  <a:srgbClr val="22282E"/>
+                </a:solidFill>
+              </a:rPr>
+              <a:t>•  Operador $ne: "not equal". Característica: {"$ne": null} casi siempre es verdadero, ideal para bypass.</a:t>
+            </a:r>
+          </a:p>
+          <a:p>
+            <a:pPr>
+              <a:spcAft>
+                <a:spcPts val="600"/>
+              </a:spcAft>
+            </a:pPr>
+            <a:r>
+              <a:rPr sz="1500">
+                <a:solidFill>
+                  <a:srgbClr val="22282E"/>
+                </a:solidFill>
+              </a:rPr>
+              <a:t>•  Operador $regex: coincidencia por expresión regular. Característica: permite inferir datos carácter a carácter (blind).</a:t>
+            </a:r>
+          </a:p>
+          <a:p>
+            <a:pPr>
+              <a:spcAft>
+                <a:spcPts val="600"/>
+              </a:spcAft>
+            </a:pPr>
+            <a:r>
+              <a:rPr sz="1500">
+                <a:solidFill>
+                  <a:srgbClr val="22282E"/>
+                </a:solidFill>
+              </a:rPr>
+              <a:t>•  $where: ejecuta JavaScript en el servidor Mongo. Característica: potente y peligroso; puede permitir DoS o extracción.</a:t>
+            </a:r>
+          </a:p>
+          <a:p>
+            <a:pPr>
+              <a:spcAft>
+                <a:spcPts val="600"/>
+              </a:spcAft>
+            </a:pPr>
+            <a:r>
+              <a:rPr sz="1500">
+                <a:solidFill>
+                  <a:srgbClr val="22282E"/>
+                </a:solidFill>
+              </a:rPr>
+              <a:t>•  Inyección de objeto: enviar {"$ne":""} donde se espera un string. Característica: posible cuando el backend no valida tipos.</a:t>
+            </a:r>
+          </a:p>
+          <a:p>
+            <a:pPr>
+              <a:spcAft>
+                <a:spcPts val="600"/>
+              </a:spcAft>
+            </a:pPr>
+            <a:r>
+              <a:rPr sz="1500">
+                <a:solidFill>
+                  <a:srgbClr val="22282E"/>
+                </a:solidFill>
+              </a:rPr>
+              <a:t>•  Type juggling: confusión de tipos entre cliente y servidor. Característica: base de muchos bypass NoSQL.</a:t>
             </a:r>
           </a:p>
         </p:txBody>
@@ -4360,7 +4751,7 @@
                   <a:srgbClr val="0B3D2E"/>
                 </a:solidFill>
               </a:rPr>
-              <a:t>🧪 Laboratorio guiado</a:t>
+              <a:t>📔 Glosario</a:t>
             </a:r>
           </a:p>
         </p:txBody>
@@ -4398,97 +4789,97 @@
                   <a:srgbClr val="22282E"/>
                 </a:solidFill>
               </a:rPr>
-              <a:t>•  Localiza un login que reciba JSON ({"username":"x","password":"y"}).</a:t>
-            </a:r>
-          </a:p>
-          <a:p>
-            <a:pPr>
-              <a:spcAft>
-                <a:spcPts val="600"/>
-              </a:spcAft>
-            </a:pPr>
-            <a:r>
-              <a:rPr sz="1500">
-                <a:solidFill>
-                  <a:srgbClr val="22282E"/>
-                </a:solidFill>
-              </a:rPr>
-              <a:t>•  Con Burp, cambia el body a inyección de operador:</a:t>
-            </a:r>
-          </a:p>
-          <a:p>
-            <a:pPr>
-              <a:spcAft>
-                <a:spcPts val="600"/>
-              </a:spcAft>
-            </a:pPr>
-            <a:r>
-              <a:rPr sz="1500">
-                <a:solidFill>
-                  <a:srgbClr val="22282E"/>
-                </a:solidFill>
-              </a:rPr>
-              <a:t>•  {"username":"admin","password":{"$ne":""}}</a:t>
-            </a:r>
-          </a:p>
-          <a:p>
-            <a:pPr>
-              <a:spcAft>
-                <a:spcPts val="600"/>
-              </a:spcAft>
-            </a:pPr>
-            <a:r>
-              <a:rPr sz="1500">
-                <a:solidFill>
-                  <a:srgbClr val="22282E"/>
-                </a:solidFill>
-              </a:rPr>
-              <a:t>•  Observa si se produce el bypass de autenticación.</a:t>
-            </a:r>
-          </a:p>
-          <a:p>
-            <a:pPr>
-              <a:spcAft>
-                <a:spcPts val="600"/>
-              </a:spcAft>
-            </a:pPr>
-            <a:r>
-              <a:rPr sz="1500">
-                <a:solidFill>
-                  <a:srgbClr val="22282E"/>
-                </a:solidFill>
-              </a:rPr>
-              <a:t>•  Prueba la variante por query string: username[$ne]=&amp;password[$ne]=.</a:t>
-            </a:r>
-          </a:p>
-          <a:p>
-            <a:pPr>
-              <a:spcAft>
-                <a:spcPts val="600"/>
-              </a:spcAft>
-            </a:pPr>
-            <a:r>
-              <a:rPr sz="1500">
-                <a:solidFill>
-                  <a:srgbClr val="22282E"/>
-                </a:solidFill>
-              </a:rPr>
-              <a:t>•  Para NoSQLi ciega, usa $regex para adivinar la contraseña:</a:t>
-            </a:r>
-          </a:p>
-          <a:p>
-            <a:pPr>
-              <a:spcAft>
-                <a:spcPts val="600"/>
-              </a:spcAft>
-            </a:pPr>
-            <a:r>
-              <a:rPr sz="1500">
-                <a:solidFill>
-                  <a:srgbClr val="22282E"/>
-                </a:solidFill>
-              </a:rPr>
-              <a:t>•  {"username":"admin","password":{"$regex":"^a"}}</a:t>
+              <a:t>•  Término — Definición concisa</a:t>
+            </a:r>
+          </a:p>
+          <a:p>
+            <a:pPr>
+              <a:spcAft>
+                <a:spcPts val="600"/>
+              </a:spcAft>
+            </a:pPr>
+            <a:r>
+              <a:rPr sz="1500">
+                <a:solidFill>
+                  <a:srgbClr val="22282E"/>
+                </a:solidFill>
+              </a:rPr>
+              <a:t>•  NoSQL — Bases no relacionales; MongoDB es documental (JSON)</a:t>
+            </a:r>
+          </a:p>
+          <a:p>
+            <a:pPr>
+              <a:spcAft>
+                <a:spcPts val="600"/>
+              </a:spcAft>
+            </a:pPr>
+            <a:r>
+              <a:rPr sz="1500">
+                <a:solidFill>
+                  <a:srgbClr val="22282E"/>
+                </a:solidFill>
+              </a:rPr>
+              <a:t>•  Inyección NoSQL — Alterar la estructura o el tipo de la consulta con operadores</a:t>
+            </a:r>
+          </a:p>
+          <a:p>
+            <a:pPr>
+              <a:spcAft>
+                <a:spcPts val="600"/>
+              </a:spcAft>
+            </a:pPr>
+            <a:r>
+              <a:rPr sz="1500">
+                <a:solidFill>
+                  <a:srgbClr val="22282E"/>
+                </a:solidFill>
+              </a:rPr>
+              <a:t>•  Operador de consulta — $ne, $gt, $regex, $where de MongoDB</a:t>
+            </a:r>
+          </a:p>
+          <a:p>
+            <a:pPr>
+              <a:spcAft>
+                <a:spcPts val="600"/>
+              </a:spcAft>
+            </a:pPr>
+            <a:r>
+              <a:rPr sz="1500">
+                <a:solidFill>
+                  <a:srgbClr val="22282E"/>
+                </a:solidFill>
+              </a:rPr>
+              <a:t>•  $ne — "Distinto de"; con "" coincide con cualquier valor</a:t>
+            </a:r>
+          </a:p>
+          <a:p>
+            <a:pPr>
+              <a:spcAft>
+                <a:spcPts val="600"/>
+              </a:spcAft>
+            </a:pPr>
+            <a:r>
+              <a:rPr sz="1500">
+                <a:solidFill>
+                  <a:srgbClr val="22282E"/>
+                </a:solidFill>
+              </a:rPr>
+              <a:t>•  Auth bypass con $ne — password: {$ne: ""} entra sin conocer la contraseña</a:t>
+            </a:r>
+          </a:p>
+          <a:p>
+            <a:pPr>
+              <a:spcAft>
+                <a:spcPts val="600"/>
+              </a:spcAft>
+            </a:pPr>
+            <a:r>
+              <a:rPr sz="1500">
+                <a:solidFill>
+                  <a:srgbClr val="22282E"/>
+                </a:solidFill>
+              </a:rPr>
+              <a:t>•  Confusión de tipo — Enviar un objeto donde se espera una cadena</a:t>
             </a:r>
           </a:p>
         </p:txBody>
@@ -4539,7 +4930,7 @@
                   <a:srgbClr val="0B3D2E"/>
                 </a:solidFill>
               </a:rPr>
-              <a:t>✍️ Ejercicios</a:t>
+              <a:t>🧰 Herramientas y preparación</a:t>
             </a:r>
           </a:p>
         </p:txBody>
@@ -4577,82 +4968,37 @@
                   <a:srgbClr val="22282E"/>
                 </a:solidFill>
               </a:rPr>
-              <a:t>•  Diferencia el payload en JSON del payload en query string para el mismo bypass.</a:t>
-            </a:r>
-          </a:p>
-          <a:p>
-            <a:pPr>
-              <a:spcAft>
-                <a:spcPts val="600"/>
-              </a:spcAft>
-            </a:pPr>
-            <a:r>
-              <a:rPr sz="1500">
-                <a:solidFill>
-                  <a:srgbClr val="22282E"/>
-                </a:solidFill>
-              </a:rPr>
-              <a:t>•  Reconstruye una contraseña de 8 caracteres con $regex blind.</a:t>
-            </a:r>
-          </a:p>
-          <a:p>
-            <a:pPr>
-              <a:spcAft>
-                <a:spcPts val="600"/>
-              </a:spcAft>
-            </a:pPr>
-            <a:r>
-              <a:rPr sz="1500">
-                <a:solidFill>
-                  <a:srgbClr val="22282E"/>
-                </a:solidFill>
-              </a:rPr>
-              <a:t>•  Explica por qué {"$gt":""} también funciona como bypass.</a:t>
-            </a:r>
-          </a:p>
-          <a:p>
-            <a:pPr>
-              <a:spcAft>
-                <a:spcPts val="600"/>
-              </a:spcAft>
-            </a:pPr>
-            <a:r>
-              <a:rPr sz="1500">
-                <a:solidFill>
-                  <a:srgbClr val="22282E"/>
-                </a:solidFill>
-              </a:rPr>
-              <a:t>•  Escribe la validación en Node que impediría el ataque (comprobar typeof === 'string').</a:t>
-            </a:r>
-          </a:p>
-          <a:p>
-            <a:pPr>
-              <a:spcAft>
-                <a:spcPts val="600"/>
-              </a:spcAft>
-            </a:pPr>
-            <a:r>
-              <a:rPr sz="1500">
-                <a:solidFill>
-                  <a:srgbClr val="22282E"/>
-                </a:solidFill>
-              </a:rPr>
-              <a:t>•  Investiga qué hace $where y por qué está desaconsejado.</a:t>
-            </a:r>
-          </a:p>
-          <a:p>
-            <a:pPr>
-              <a:spcAft>
-                <a:spcPts val="600"/>
-              </a:spcAft>
-            </a:pPr>
-            <a:r>
-              <a:rPr sz="1500">
-                <a:solidFill>
-                  <a:srgbClr val="22282E"/>
-                </a:solidFill>
-              </a:rPr>
-              <a:t>•  Compara conceptualmente SQLi y NoSQLi: similitudes y diferencias.</a:t>
+              <a:t>•  OWASP Juice Shop (usa MongoDB-like en algunos retos) o un lab DVNA/NodeGoat.</a:t>
+            </a:r>
+          </a:p>
+          <a:p>
+            <a:pPr>
+              <a:spcAft>
+                <a:spcPts val="600"/>
+              </a:spcAft>
+            </a:pPr>
+            <a:r>
+              <a:rPr sz="1500">
+                <a:solidFill>
+                  <a:srgbClr val="22282E"/>
+                </a:solidFill>
+              </a:rPr>
+              <a:t>•  Burp Suite para editar cuerpos JSON.</a:t>
+            </a:r>
+          </a:p>
+          <a:p>
+            <a:pPr>
+              <a:spcAft>
+                <a:spcPts val="600"/>
+              </a:spcAft>
+            </a:pPr>
+            <a:r>
+              <a:rPr sz="1500">
+                <a:solidFill>
+                  <a:srgbClr val="22282E"/>
+                </a:solidFill>
+              </a:rPr>
+              <a:t>•  NoSQLMap (opcional, para automatizar).</a:t>
             </a:r>
           </a:p>
         </p:txBody>
@@ -4703,7 +5049,7 @@
                   <a:srgbClr val="0B3D2E"/>
                 </a:solidFill>
               </a:rPr>
-              <a:t>📝 Reto verificable</a:t>
+              <a:t>🧪 Laboratorio guiado</a:t>
             </a:r>
           </a:p>
         </p:txBody>
@@ -4741,22 +5087,97 @@
                   <a:srgbClr val="22282E"/>
                 </a:solidFill>
               </a:rPr>
-              <a:t>•  Consigue un bypass de autenticación en un lab NoSQL (NodeGoat/Juice Shop) y luego extrae parcialmente una credencial con NoSQLi ciega por $regex.</a:t>
-            </a:r>
-          </a:p>
-          <a:p>
-            <a:pPr>
-              <a:spcAft>
-                <a:spcPts val="600"/>
-              </a:spcAft>
-            </a:pPr>
-            <a:r>
-              <a:rPr sz="1500">
-                <a:solidFill>
-                  <a:srgbClr val="22282E"/>
-                </a:solidFill>
-              </a:rPr>
-              <a:t>•  Criterio de aceptación: demuestras el login sin conocer la contraseña y recuperas al menos los primeros caracteres del valor real mediante $regex, documentando los payloads.</a:t>
+              <a:t>•  Localiza un login que reciba JSON ({"username":"x","password":"y"}).</a:t>
+            </a:r>
+          </a:p>
+          <a:p>
+            <a:pPr>
+              <a:spcAft>
+                <a:spcPts val="600"/>
+              </a:spcAft>
+            </a:pPr>
+            <a:r>
+              <a:rPr sz="1500">
+                <a:solidFill>
+                  <a:srgbClr val="22282E"/>
+                </a:solidFill>
+              </a:rPr>
+              <a:t>•  Con Burp, cambia el body a inyección de operador:</a:t>
+            </a:r>
+          </a:p>
+          <a:p>
+            <a:pPr>
+              <a:spcAft>
+                <a:spcPts val="600"/>
+              </a:spcAft>
+            </a:pPr>
+            <a:r>
+              <a:rPr sz="1500">
+                <a:solidFill>
+                  <a:srgbClr val="22282E"/>
+                </a:solidFill>
+              </a:rPr>
+              <a:t>•  Observa si se produce el bypass de autenticación.</a:t>
+            </a:r>
+          </a:p>
+          <a:p>
+            <a:pPr>
+              <a:spcAft>
+                <a:spcPts val="600"/>
+              </a:spcAft>
+            </a:pPr>
+            <a:r>
+              <a:rPr sz="1500">
+                <a:solidFill>
+                  <a:srgbClr val="22282E"/>
+                </a:solidFill>
+              </a:rPr>
+              <a:t>•  Prueba la variante por query string: username[$ne]=&amp;password[$ne]=.</a:t>
+            </a:r>
+          </a:p>
+          <a:p>
+            <a:pPr>
+              <a:spcAft>
+                <a:spcPts val="600"/>
+              </a:spcAft>
+            </a:pPr>
+            <a:r>
+              <a:rPr sz="1500">
+                <a:solidFill>
+                  <a:srgbClr val="22282E"/>
+                </a:solidFill>
+              </a:rPr>
+              <a:t>•  Para NoSQLi ciega, usa $regex para adivinar la contraseña:</a:t>
+            </a:r>
+          </a:p>
+          <a:p>
+            <a:pPr>
+              <a:spcAft>
+                <a:spcPts val="600"/>
+              </a:spcAft>
+            </a:pPr>
+            <a:r>
+              <a:rPr sz="1500">
+                <a:solidFill>
+                  <a:srgbClr val="22282E"/>
+                </a:solidFill>
+              </a:rPr>
+              <a:t>•  Itera el prefijo (^a, ^ab, ...) según la respuesta de login para reconstruir el valor.</a:t>
+            </a:r>
+          </a:p>
+          <a:p>
+            <a:pPr>
+              <a:spcAft>
+                <a:spcPts val="600"/>
+              </a:spcAft>
+            </a:pPr>
+            <a:r>
+              <a:rPr sz="1500">
+                <a:solidFill>
+                  <a:srgbClr val="22282E"/>
+                </a:solidFill>
+              </a:rPr>
+              <a:t>•  Si el backend usa $where, prueba una condición JS y evalúa el riesgo (sin causar DoS).</a:t>
             </a:r>
           </a:p>
         </p:txBody>
